--- a/Taller_6Junio/Certificados/Certificado_Taller_Hangul_PROFESIONAL.pptx
+++ b/Taller_6Junio/Certificados/Certificado_Taller_Hangul_PROFESIONAL.pptx
@@ -881,6 +881,10 @@
             <a:pPr marL="0" indent="0" algn="ctr">
               <a:buNone/>
             </a:pPr>
+            <a:r>
+              <a:rPr lang="ko-KR" altLang="es-CL" sz="2400" b="1"/>
+              <a:t>카롤리나 오르테가 로차</a:t>
+            </a:r>
             <a:endParaRPr lang="en-US" sz="2400" b="1" dirty="0"/>
           </a:p>
         </p:txBody>

--- a/Taller_6Junio/Certificados/Certificado_Taller_Hangul_PROFESIONAL.pptx
+++ b/Taller_6Junio/Certificados/Certificado_Taller_Hangul_PROFESIONAL.pptx
@@ -883,7 +883,7 @@
             </a:pPr>
             <a:r>
               <a:rPr lang="ko-KR" altLang="es-CL" sz="2400" b="1"/>
-              <a:t>카롤리나 오르테가 로차</a:t>
+              <a:t>다야나 코보스</a:t>
             </a:r>
             <a:endParaRPr lang="en-US" sz="2400" b="1" dirty="0"/>
           </a:p>

--- a/Taller_6Junio/Certificados/Certificado_Taller_Hangul_PROFESIONAL.pptx
+++ b/Taller_6Junio/Certificados/Certificado_Taller_Hangul_PROFESIONAL.pptx
@@ -883,7 +883,7 @@
             </a:pPr>
             <a:r>
               <a:rPr lang="ko-KR" altLang="es-CL" sz="2400" b="1"/>
-              <a:t>다야나 코보스</a:t>
+              <a:t>안드레아 루비뇨</a:t>
             </a:r>
             <a:endParaRPr lang="en-US" sz="2400" b="1" dirty="0"/>
           </a:p>
